--- a/Day7/7-paev-andmetarkus-esitlus.pptx
+++ b/Day7/7-paev-andmetarkus-esitlus.pptx
@@ -5,37 +5,36 @@
     <p:sldMasterId id="2147483648" r:id="rId4"/>
   </p:sldMasterIdLst>
   <p:notesMasterIdLst>
-    <p:notesMasterId r:id="rId13"/>
+    <p:notesMasterId r:id="rId12"/>
   </p:notesMasterIdLst>
   <p:handoutMasterIdLst>
-    <p:handoutMasterId r:id="rId14"/>
+    <p:handoutMasterId r:id="rId13"/>
   </p:handoutMasterIdLst>
   <p:sldIdLst>
     <p:sldId id="417" r:id="rId5"/>
     <p:sldId id="463" r:id="rId6"/>
     <p:sldId id="641" r:id="rId7"/>
     <p:sldId id="559" r:id="rId8"/>
-    <p:sldId id="492" r:id="rId9"/>
-    <p:sldId id="611" r:id="rId10"/>
-    <p:sldId id="560" r:id="rId11"/>
-    <p:sldId id="561" r:id="rId12"/>
+    <p:sldId id="611" r:id="rId9"/>
+    <p:sldId id="560" r:id="rId10"/>
+    <p:sldId id="561" r:id="rId11"/>
   </p:sldIdLst>
   <p:sldSz cx="12192000" cy="6858000"/>
   <p:notesSz cx="6858000" cy="9144000"/>
   <p:embeddedFontLst>
     <p:embeddedFont>
       <p:font typeface="Inter" panose="020B0604020202020204" charset="0"/>
-      <p:regular r:id="rId15"/>
+      <p:regular r:id="rId14"/>
+      <p:bold r:id="rId15"/>
+    </p:embeddedFont>
+    <p:embeddedFont>
+      <p:font typeface="Inter Bold" panose="020B0604020202020204" charset="0"/>
       <p:bold r:id="rId16"/>
     </p:embeddedFont>
     <p:embeddedFont>
-      <p:font typeface="Inter Bold" panose="020B0604020202020204" charset="0"/>
+      <p:font typeface="Poppins SemiBold" panose="00000700000000000000" pitchFamily="2" charset="0"/>
       <p:bold r:id="rId17"/>
-    </p:embeddedFont>
-    <p:embeddedFont>
-      <p:font typeface="Poppins SemiBold" panose="00000700000000000000" pitchFamily="2" charset="0"/>
-      <p:bold r:id="rId18"/>
-      <p:boldItalic r:id="rId19"/>
+      <p:boldItalic r:id="rId18"/>
     </p:embeddedFont>
   </p:embeddedFontLst>
   <p:defaultTextStyle>
@@ -144,17 +143,25 @@
 </p:presentation>
 </file>
 
+<file path=ppt/revisionInfo.xml><?xml version="1.0" encoding="utf-8"?>
+<p1510:revInfo xmlns:a="http://schemas.openxmlformats.org/drawingml/2006/main" xmlns:r="http://schemas.openxmlformats.org/officeDocument/2006/relationships" xmlns:p1510="http://schemas.microsoft.com/office/powerpoint/2015/10/main">
+  <p1510:revLst>
+    <p1510:client id="{65D81BF4-4944-4E0E-85AE-1DD611A6ECD5}" v="1" dt="2026-04-07T14:17:43.546"/>
+  </p1510:revLst>
+</p1510:revInfo>
+</file>
+
 <file path=ppt/changesInfos/changesInfo1.xml><?xml version="1.0" encoding="utf-8"?>
 <pc:chgInfo xmlns:a="http://schemas.openxmlformats.org/drawingml/2006/main" xmlns:r="http://schemas.openxmlformats.org/officeDocument/2006/relationships" xmlns:ac="http://schemas.microsoft.com/office/drawing/2013/main/command" xmlns:pc="http://schemas.microsoft.com/office/powerpoint/2013/main/command">
   <pc:docChgLst>
     <pc:chgData name="Virve Räni" userId="161a7437-7ef4-49ec-91bf-54882f313dfe" providerId="ADAL" clId="{6D754EED-65AA-4A21-B175-6769012CF487}"/>
-    <pc:docChg chg="modSld">
-      <pc:chgData name="Virve Räni" userId="161a7437-7ef4-49ec-91bf-54882f313dfe" providerId="ADAL" clId="{6D754EED-65AA-4A21-B175-6769012CF487}" dt="2026-03-16T10:57:19.038" v="4" actId="20577"/>
+    <pc:docChg chg="undo custSel delSld modSld">
+      <pc:chgData name="Virve Räni" userId="161a7437-7ef4-49ec-91bf-54882f313dfe" providerId="ADAL" clId="{6D754EED-65AA-4A21-B175-6769012CF487}" dt="2026-04-07T14:28:21.429" v="377" actId="20577"/>
       <pc:docMkLst>
         <pc:docMk/>
       </pc:docMkLst>
       <pc:sldChg chg="modSp mod">
-        <pc:chgData name="Virve Räni" userId="161a7437-7ef4-49ec-91bf-54882f313dfe" providerId="ADAL" clId="{6D754EED-65AA-4A21-B175-6769012CF487}" dt="2026-03-16T10:57:10.704" v="0" actId="20577"/>
+        <pc:chgData name="Virve Räni" userId="161a7437-7ef4-49ec-91bf-54882f313dfe" providerId="ADAL" clId="{6D754EED-65AA-4A21-B175-6769012CF487}" dt="2026-04-07T14:11:42.383" v="48" actId="20577"/>
         <pc:sldMkLst>
           <pc:docMk/>
           <pc:sldMk cId="2142720034" sldId="463"/>
@@ -167,15 +174,53 @@
             <ac:spMk id="2" creationId="{3B319E6A-EDBC-A257-8CAB-1456AC180BF7}"/>
           </ac:spMkLst>
         </pc:spChg>
+        <pc:graphicFrameChg chg="modGraphic">
+          <ac:chgData name="Virve Räni" userId="161a7437-7ef4-49ec-91bf-54882f313dfe" providerId="ADAL" clId="{6D754EED-65AA-4A21-B175-6769012CF487}" dt="2026-04-07T14:11:42.383" v="48" actId="20577"/>
+          <ac:graphicFrameMkLst>
+            <pc:docMk/>
+            <pc:sldMk cId="2142720034" sldId="463"/>
+            <ac:graphicFrameMk id="5" creationId="{03997827-D239-7775-E4A3-5EB245AAACB2}"/>
+          </ac:graphicFrameMkLst>
+        </pc:graphicFrameChg>
+      </pc:sldChg>
+      <pc:sldChg chg="del">
+        <pc:chgData name="Virve Räni" userId="161a7437-7ef4-49ec-91bf-54882f313dfe" providerId="ADAL" clId="{6D754EED-65AA-4A21-B175-6769012CF487}" dt="2026-04-07T14:12:45.032" v="160" actId="47"/>
+        <pc:sldMkLst>
+          <pc:docMk/>
+          <pc:sldMk cId="4264120663" sldId="492"/>
+        </pc:sldMkLst>
       </pc:sldChg>
       <pc:sldChg chg="modSp mod">
-        <pc:chgData name="Virve Räni" userId="161a7437-7ef4-49ec-91bf-54882f313dfe" providerId="ADAL" clId="{6D754EED-65AA-4A21-B175-6769012CF487}" dt="2026-03-16T10:57:19.038" v="4" actId="20577"/>
+        <pc:chgData name="Virve Räni" userId="161a7437-7ef4-49ec-91bf-54882f313dfe" providerId="ADAL" clId="{6D754EED-65AA-4A21-B175-6769012CF487}" dt="2026-04-07T14:12:54.449" v="177" actId="20577"/>
+        <pc:sldMkLst>
+          <pc:docMk/>
+          <pc:sldMk cId="3870796602" sldId="611"/>
+        </pc:sldMkLst>
+        <pc:spChg chg="mod">
+          <ac:chgData name="Virve Räni" userId="161a7437-7ef4-49ec-91bf-54882f313dfe" providerId="ADAL" clId="{6D754EED-65AA-4A21-B175-6769012CF487}" dt="2026-04-07T14:12:54.449" v="177" actId="20577"/>
+          <ac:spMkLst>
+            <pc:docMk/>
+            <pc:sldMk cId="3870796602" sldId="611"/>
+            <ac:spMk id="5" creationId="{F9557069-2E5E-8598-EF63-D471222B02C7}"/>
+          </ac:spMkLst>
+        </pc:spChg>
+      </pc:sldChg>
+      <pc:sldChg chg="modSp mod">
+        <pc:chgData name="Virve Räni" userId="161a7437-7ef4-49ec-91bf-54882f313dfe" providerId="ADAL" clId="{6D754EED-65AA-4A21-B175-6769012CF487}" dt="2026-04-07T14:28:21.429" v="377" actId="20577"/>
         <pc:sldMkLst>
           <pc:docMk/>
           <pc:sldMk cId="4039098990" sldId="641"/>
         </pc:sldMkLst>
         <pc:spChg chg="mod">
-          <ac:chgData name="Virve Räni" userId="161a7437-7ef4-49ec-91bf-54882f313dfe" providerId="ADAL" clId="{6D754EED-65AA-4A21-B175-6769012CF487}" dt="2026-03-16T10:57:19.038" v="4" actId="20577"/>
+          <ac:chgData name="Virve Räni" userId="161a7437-7ef4-49ec-91bf-54882f313dfe" providerId="ADAL" clId="{6D754EED-65AA-4A21-B175-6769012CF487}" dt="2026-04-07T14:11:58.261" v="86" actId="20577"/>
+          <ac:spMkLst>
+            <pc:docMk/>
+            <pc:sldMk cId="4039098990" sldId="641"/>
+            <ac:spMk id="2" creationId="{939B5782-C166-DFAD-FABB-09B61EA805D9}"/>
+          </ac:spMkLst>
+        </pc:spChg>
+        <pc:spChg chg="mod">
+          <ac:chgData name="Virve Räni" userId="161a7437-7ef4-49ec-91bf-54882f313dfe" providerId="ADAL" clId="{6D754EED-65AA-4A21-B175-6769012CF487}" dt="2026-04-07T14:28:21.429" v="377" actId="20577"/>
           <ac:spMkLst>
             <pc:docMk/>
             <pc:sldMk cId="4039098990" sldId="641"/>
@@ -282,7 +327,7 @@
           <a:p>
             <a:fld id="{F9D2AD6E-DEDD-49A0-A4BE-7A081A9112DA}" type="datetimeFigureOut">
               <a:rPr lang="en-US" smtClean="0"/>
-              <a:t>3/16/2026</a:t>
+              <a:t>4/7/2026</a:t>
             </a:fld>
             <a:endParaRPr lang="en-US"/>
           </a:p>
@@ -458,7 +503,7 @@
           </a:lstStyle>
           <a:p>
             <a:fld id="{2AF9C1A6-4321-41FA-B001-4140F0E2457F}" type="datetimeFigureOut">
-              <a:t>16.03.2026</a:t>
+              <a:t>07.04.2026</a:t>
             </a:fld>
             <a:endParaRPr lang="en-US"/>
           </a:p>
@@ -850,10 +895,10 @@
           <p:nvPr userDrawn="1"/>
         </p:nvPicPr>
         <p:blipFill>
-          <a:blip r:embed="rId2">
+          <a:blip>
             <a:extLst>
               <a:ext uri="{96DAC541-7B7A-43D3-8B79-37D633B846F1}">
-                <asvg:svgBlip xmlns:asvg="http://schemas.microsoft.com/office/drawing/2016/SVG/main" r:embed="rId3"/>
+                <asvg:svgBlip xmlns:asvg="http://schemas.microsoft.com/office/drawing/2016/SVG/main" r:embed="rId2"/>
               </a:ext>
             </a:extLst>
           </a:blip>
@@ -10411,10 +10456,10 @@
             <a:ext cx="810000" cy="320400"/>
           </a:xfrm>
           <a:blipFill>
-            <a:blip r:embed="rId2">
+            <a:blip>
               <a:extLst>
                 <a:ext uri="{96DAC541-7B7A-43D3-8B79-37D633B846F1}">
-                  <asvg:svgBlip xmlns:asvg="http://schemas.microsoft.com/office/drawing/2016/SVG/main" r:embed="rId3"/>
+                  <asvg:svgBlip xmlns:asvg="http://schemas.microsoft.com/office/drawing/2016/SVG/main" r:embed="rId2"/>
                 </a:ext>
               </a:extLst>
             </a:blip>
@@ -11693,10 +11738,10 @@
             <a:ext cx="810000" cy="320400"/>
           </a:xfrm>
           <a:blipFill>
-            <a:blip r:embed="rId2">
+            <a:blip>
               <a:extLst>
                 <a:ext uri="{96DAC541-7B7A-43D3-8B79-37D633B846F1}">
-                  <asvg:svgBlip xmlns:asvg="http://schemas.microsoft.com/office/drawing/2016/SVG/main" r:embed="rId3"/>
+                  <asvg:svgBlip xmlns:asvg="http://schemas.microsoft.com/office/drawing/2016/SVG/main" r:embed="rId2"/>
                 </a:ext>
               </a:extLst>
             </a:blip>
@@ -11937,7 +11982,7 @@
           <a:p>
             <a:fld id="{DE840A40-73C8-4048-8140-49F5D65BB431}" type="datetimeFigureOut">
               <a:rPr lang="et-EE" smtClean="0"/>
-              <a:t>16.03.2026</a:t>
+              <a:t>07.04.2026</a:t>
             </a:fld>
             <a:endParaRPr lang="et-EE"/>
           </a:p>
@@ -12050,10 +12095,10 @@
           <p:nvPr userDrawn="1"/>
         </p:nvPicPr>
         <p:blipFill>
-          <a:blip r:embed="rId2">
+          <a:blip>
             <a:extLst>
               <a:ext uri="{96DAC541-7B7A-43D3-8B79-37D633B846F1}">
-                <asvg:svgBlip xmlns:asvg="http://schemas.microsoft.com/office/drawing/2016/SVG/main" r:embed="rId3"/>
+                <asvg:svgBlip xmlns:asvg="http://schemas.microsoft.com/office/drawing/2016/SVG/main" r:embed="rId2"/>
               </a:ext>
             </a:extLst>
           </a:blip>
@@ -19032,10 +19077,10 @@
             <a:ext cx="2302064" cy="927536"/>
           </a:xfrm>
           <a:blipFill>
-            <a:blip r:embed="rId2">
+            <a:blip>
               <a:extLst>
                 <a:ext uri="{96DAC541-7B7A-43D3-8B79-37D633B846F1}">
-                  <asvg:svgBlip xmlns:asvg="http://schemas.microsoft.com/office/drawing/2016/SVG/main" r:embed="rId3"/>
+                  <asvg:svgBlip xmlns:asvg="http://schemas.microsoft.com/office/drawing/2016/SVG/main" r:embed="rId2"/>
                 </a:ext>
               </a:extLst>
             </a:blip>
@@ -19218,10 +19263,10 @@
           <p:nvPr userDrawn="1"/>
         </p:nvPicPr>
         <p:blipFill>
-          <a:blip r:embed="rId2">
+          <a:blip>
             <a:extLst>
               <a:ext uri="{96DAC541-7B7A-43D3-8B79-37D633B846F1}">
-                <asvg:svgBlip xmlns:asvg="http://schemas.microsoft.com/office/drawing/2016/SVG/main" r:embed="rId3"/>
+                <asvg:svgBlip xmlns:asvg="http://schemas.microsoft.com/office/drawing/2016/SVG/main" r:embed="rId2"/>
               </a:ext>
             </a:extLst>
           </a:blip>
@@ -19952,10 +19997,10 @@
           <p:nvPr userDrawn="1"/>
         </p:nvPicPr>
         <p:blipFill>
-          <a:blip r:embed="rId2">
+          <a:blip>
             <a:extLst>
               <a:ext uri="{96DAC541-7B7A-43D3-8B79-37D633B846F1}">
-                <asvg:svgBlip xmlns:asvg="http://schemas.microsoft.com/office/drawing/2016/SVG/main" r:embed="rId3"/>
+                <asvg:svgBlip xmlns:asvg="http://schemas.microsoft.com/office/drawing/2016/SVG/main" r:embed="rId2"/>
               </a:ext>
             </a:extLst>
           </a:blip>
@@ -20741,10 +20786,10 @@
             <a:ext cx="810000" cy="320400"/>
           </a:xfrm>
           <a:blipFill>
-            <a:blip r:embed="rId2">
+            <a:blip>
               <a:extLst>
                 <a:ext uri="{96DAC541-7B7A-43D3-8B79-37D633B846F1}">
-                  <asvg:svgBlip xmlns:asvg="http://schemas.microsoft.com/office/drawing/2016/SVG/main" r:embed="rId3"/>
+                  <asvg:svgBlip xmlns:asvg="http://schemas.microsoft.com/office/drawing/2016/SVG/main" r:embed="rId2"/>
                 </a:ext>
               </a:extLst>
             </a:blip>
@@ -24129,7 +24174,7 @@
             <p:ph sz="quarter" idx="10"/>
             <p:extLst>
               <p:ext uri="{D42A27DB-BD31-4B8C-83A1-F6EECF244321}">
-                <p14:modId xmlns:p14="http://schemas.microsoft.com/office/powerpoint/2010/main" val="2872712709"/>
+                <p14:modId xmlns:p14="http://schemas.microsoft.com/office/powerpoint/2010/main" val="734219904"/>
               </p:ext>
             </p:extLst>
           </p:nvPr>
@@ -24174,7 +24219,7 @@
                           <a:effectLst/>
                           <a:latin typeface="Inter"/>
                         </a:rPr>
-                        <a:t>09:00 – 10:30 – </a:t>
+                        <a:t>09:00 – 10:30 – Koolitus – </a:t>
                       </a:r>
                       <a:r>
                         <a:rPr lang="en-US" sz="2400" b="0" i="0" dirty="0" err="1">
@@ -24184,27 +24229,7 @@
                           <a:effectLst/>
                           <a:latin typeface="Inter"/>
                         </a:rPr>
-                        <a:t>Koolitus</a:t>
-                      </a:r>
-                      <a:r>
-                        <a:rPr lang="en-US" sz="2400" b="0" i="0" dirty="0">
-                          <a:solidFill>
-                            <a:srgbClr val="121212"/>
-                          </a:solidFill>
-                          <a:effectLst/>
-                          <a:latin typeface="Inter"/>
-                        </a:rPr>
-                        <a:t> - </a:t>
-                      </a:r>
-                      <a:r>
-                        <a:rPr lang="en-US" sz="2400" b="0" i="0" dirty="0" err="1">
-                          <a:solidFill>
-                            <a:srgbClr val="121212"/>
-                          </a:solidFill>
-                          <a:effectLst/>
-                          <a:latin typeface="Inter"/>
-                        </a:rPr>
-                        <a:t>Kuupäevade</a:t>
+                        <a:t>Kohviku</a:t>
                       </a:r>
                       <a:r>
                         <a:rPr lang="en-US" sz="2400" b="0" i="0" dirty="0">
@@ -24224,18 +24249,15 @@
                           <a:effectLst/>
                           <a:latin typeface="Inter"/>
                         </a:rPr>
-                        <a:t>funktsioonid</a:t>
+                        <a:t>andmestik</a:t>
                       </a:r>
-                      <a:r>
-                        <a:rPr lang="en-US" sz="2400" b="0" i="0" dirty="0">
-                          <a:solidFill>
-                            <a:srgbClr val="121212"/>
-                          </a:solidFill>
-                          <a:effectLst/>
-                          <a:latin typeface="Inter"/>
-                        </a:rPr>
-                        <a:t> </a:t>
-                      </a:r>
+                      <a:endParaRPr lang="en-US" sz="2400" b="0" i="0" dirty="0">
+                        <a:solidFill>
+                          <a:srgbClr val="121212"/>
+                        </a:solidFill>
+                        <a:effectLst/>
+                        <a:latin typeface="Inter"/>
+                      </a:endParaRPr>
                     </a:p>
                   </a:txBody>
                   <a:tcPr marL="99060" marR="99060" marT="49530" marB="49530" anchor="ctr">
@@ -24376,27 +24398,7 @@
                           <a:effectLst/>
                           <a:latin typeface="Inter"/>
                         </a:rPr>
-                        <a:t>10:45 – 12:15 – </a:t>
-                      </a:r>
-                      <a:r>
-                        <a:rPr lang="en-US" sz="2400" b="0" i="0" dirty="0" err="1">
-                          <a:solidFill>
-                            <a:srgbClr val="121212"/>
-                          </a:solidFill>
-                          <a:effectLst/>
-                          <a:latin typeface="Inter"/>
-                        </a:rPr>
-                        <a:t>Koolitus</a:t>
-                      </a:r>
-                      <a:r>
-                        <a:rPr lang="en-US" sz="2400" b="0" i="0" dirty="0">
-                          <a:solidFill>
-                            <a:srgbClr val="121212"/>
-                          </a:solidFill>
-                          <a:effectLst/>
-                          <a:latin typeface="Inter"/>
-                        </a:rPr>
-                        <a:t> – </a:t>
+                        <a:t>10:45 – 12:15 – Koolitus – </a:t>
                       </a:r>
                       <a:r>
                         <a:rPr lang="en-US" sz="2400" b="0" i="0" u="none" strike="noStrike" noProof="0" dirty="0" err="1">
@@ -24406,7 +24408,7 @@
                           <a:effectLst/>
                           <a:latin typeface="Inter"/>
                         </a:rPr>
-                        <a:t>Müügiandmete</a:t>
+                        <a:t>Kohviku</a:t>
                       </a:r>
                       <a:r>
                         <a:rPr lang="en-US" sz="2400" b="0" i="0" u="none" strike="noStrike" noProof="0" dirty="0">
@@ -24426,7 +24428,7 @@
                           <a:effectLst/>
                           <a:latin typeface="Inter"/>
                         </a:rPr>
-                        <a:t>ülevaade</a:t>
+                        <a:t>andmestiku</a:t>
                       </a:r>
                       <a:r>
                         <a:rPr lang="en-US" sz="2400" b="0" i="0" u="none" strike="noStrike" noProof="0" dirty="0">
@@ -24446,7 +24448,7 @@
                           <a:effectLst/>
                           <a:latin typeface="Inter"/>
                         </a:rPr>
-                        <a:t>SQLiga</a:t>
+                        <a:t>analüüs</a:t>
                       </a:r>
                       <a:endParaRPr lang="en-US" b="0" i="0" dirty="0" err="1">
                         <a:solidFill>
@@ -24952,7 +24954,7 @@
           <a:p>
             <a:r>
               <a:rPr lang="en-US" dirty="0" err="1"/>
-              <a:t>Kuupäeva</a:t>
+              <a:t>Kohviku</a:t>
             </a:r>
             <a:r>
               <a:rPr lang="en-US" dirty="0"/>
@@ -24960,16 +24962,17 @@
             </a:r>
             <a:r>
               <a:rPr lang="en-US" dirty="0" err="1"/>
-              <a:t>funktsioonid</a:t>
+              <a:t>andmestiku</a:t>
             </a:r>
             <a:r>
               <a:rPr lang="en-US" dirty="0"/>
-              <a:t> ja </a:t>
+              <a:t> </a:t>
             </a:r>
             <a:r>
               <a:rPr lang="en-US" dirty="0" err="1"/>
-              <a:t>harjutused</a:t>
+              <a:t>analüüs</a:t>
             </a:r>
+            <a:endParaRPr lang="en-US" dirty="0"/>
           </a:p>
         </p:txBody>
       </p:sp>
@@ -25003,9 +25006,69 @@
               <a:rPr lang="en-US" sz="2000" dirty="0">
                 <a:ea typeface="Inter"/>
               </a:rPr>
-              <a:t>Day7 --&gt; budget_monthly_sales_rep.csv</a:t>
+              <a:t>Lae alla </a:t>
             </a:r>
-            <a:endParaRPr lang="en-US" sz="2000" dirty="0"/>
+            <a:r>
+              <a:rPr lang="en-US" sz="2000" dirty="0" err="1">
+                <a:ea typeface="Inter"/>
+              </a:rPr>
+              <a:t>andmestikud</a:t>
+            </a:r>
+            <a:r>
+              <a:rPr lang="en-US" sz="2000" dirty="0">
+                <a:ea typeface="Inter"/>
+              </a:rPr>
+              <a:t>: </a:t>
+            </a:r>
+          </a:p>
+          <a:p>
+            <a:pPr lvl="1">
+              <a:lnSpc>
+                <a:spcPct val="150000"/>
+              </a:lnSpc>
+            </a:pPr>
+            <a:r>
+              <a:rPr lang="en-US" sz="2000" dirty="0">
+                <a:ea typeface="Inter"/>
+              </a:rPr>
+              <a:t>Day7 --&gt; </a:t>
+            </a:r>
+          </a:p>
+          <a:p>
+            <a:pPr lvl="2">
+              <a:lnSpc>
+                <a:spcPct val="150000"/>
+              </a:lnSpc>
+            </a:pPr>
+            <a:r>
+              <a:rPr lang="en-US" sz="2000" dirty="0">
+                <a:ea typeface="Inter"/>
+              </a:rPr>
+              <a:t>cafe_sales_cleaned.csv</a:t>
+            </a:r>
+          </a:p>
+          <a:p>
+            <a:pPr lvl="2">
+              <a:lnSpc>
+                <a:spcPct val="150000"/>
+              </a:lnSpc>
+            </a:pPr>
+            <a:r>
+              <a:rPr lang="en-US" sz="2000" dirty="0">
+                <a:ea typeface="Inter"/>
+              </a:rPr>
+              <a:t>cafe_budget.csv</a:t>
+            </a:r>
+          </a:p>
+          <a:p>
+            <a:pPr lvl="2">
+              <a:lnSpc>
+                <a:spcPct val="150000"/>
+              </a:lnSpc>
+            </a:pPr>
+            <a:endParaRPr lang="en-US" sz="2000" dirty="0">
+              <a:ea typeface="Inter"/>
+            </a:endParaRPr>
           </a:p>
           <a:p>
             <a:pPr>
@@ -25017,8 +25080,151 @@
               <a:rPr lang="en-US" sz="2000" dirty="0">
                 <a:ea typeface="Inter"/>
               </a:rPr>
-              <a:t>Day7 --&gt; sql_ulesanded_7.txt</a:t>
+              <a:t>Loo </a:t>
             </a:r>
+            <a:r>
+              <a:rPr lang="en-US" sz="2000" dirty="0" err="1">
+                <a:ea typeface="Inter"/>
+              </a:rPr>
+              <a:t>uus</a:t>
+            </a:r>
+            <a:r>
+              <a:rPr lang="en-US" sz="2000" dirty="0">
+                <a:ea typeface="Inter"/>
+              </a:rPr>
+              <a:t> </a:t>
+            </a:r>
+            <a:r>
+              <a:rPr lang="en-US" sz="2000" dirty="0" err="1">
+                <a:ea typeface="Inter"/>
+              </a:rPr>
+              <a:t>andmebaas</a:t>
+            </a:r>
+            <a:r>
+              <a:rPr lang="en-US" sz="2000" dirty="0">
+                <a:ea typeface="Inter"/>
+              </a:rPr>
+              <a:t> cafe</a:t>
+            </a:r>
+          </a:p>
+          <a:p>
+            <a:pPr>
+              <a:lnSpc>
+                <a:spcPct val="150000"/>
+              </a:lnSpc>
+            </a:pPr>
+            <a:r>
+              <a:rPr lang="en-US" sz="2000" dirty="0">
+                <a:ea typeface="Inter"/>
+              </a:rPr>
+              <a:t>Loo </a:t>
+            </a:r>
+            <a:r>
+              <a:rPr lang="en-US" sz="2000" dirty="0" err="1">
+                <a:ea typeface="Inter"/>
+              </a:rPr>
+              <a:t>uus</a:t>
+            </a:r>
+            <a:r>
+              <a:rPr lang="en-US" sz="2000" dirty="0">
+                <a:ea typeface="Inter"/>
+              </a:rPr>
+              <a:t> schema </a:t>
+            </a:r>
+            <a:r>
+              <a:rPr lang="en-US" sz="2000" dirty="0" err="1">
+                <a:ea typeface="Inter"/>
+              </a:rPr>
+              <a:t>cafe_sales</a:t>
+            </a:r>
+            <a:endParaRPr lang="en-US" sz="2000" dirty="0">
+              <a:ea typeface="Inter"/>
+            </a:endParaRPr>
+          </a:p>
+          <a:p>
+            <a:pPr>
+              <a:lnSpc>
+                <a:spcPct val="150000"/>
+              </a:lnSpc>
+            </a:pPr>
+            <a:r>
+              <a:rPr lang="en-US" sz="2000" dirty="0">
+                <a:ea typeface="Inter"/>
+              </a:rPr>
+              <a:t>Lae </a:t>
+            </a:r>
+            <a:r>
+              <a:rPr lang="en-US" sz="2000" dirty="0" err="1">
+                <a:ea typeface="Inter"/>
+              </a:rPr>
+              <a:t>üles</a:t>
+            </a:r>
+            <a:r>
+              <a:rPr lang="en-US" sz="2000" dirty="0">
+                <a:ea typeface="Inter"/>
+              </a:rPr>
+              <a:t> </a:t>
+            </a:r>
+            <a:r>
+              <a:rPr lang="en-US" sz="2000" dirty="0" err="1">
+                <a:ea typeface="Inter"/>
+              </a:rPr>
+              <a:t>tabelid</a:t>
+            </a:r>
+            <a:endParaRPr lang="en-US" sz="2000" dirty="0">
+              <a:ea typeface="Inter"/>
+            </a:endParaRPr>
+          </a:p>
+          <a:p>
+            <a:pPr marL="0" indent="0">
+              <a:lnSpc>
+                <a:spcPct val="150000"/>
+              </a:lnSpc>
+              <a:buNone/>
+            </a:pPr>
+            <a:endParaRPr lang="en-US" sz="2000" dirty="0"/>
+          </a:p>
+          <a:p>
+            <a:pPr>
+              <a:lnSpc>
+                <a:spcPct val="150000"/>
+              </a:lnSpc>
+            </a:pPr>
+            <a:r>
+              <a:rPr lang="en-US" sz="2000" dirty="0" err="1">
+                <a:ea typeface="Inter"/>
+              </a:rPr>
+              <a:t>Lahenda</a:t>
+            </a:r>
+            <a:r>
+              <a:rPr lang="en-US" sz="2000" dirty="0">
+                <a:ea typeface="Inter"/>
+              </a:rPr>
+              <a:t> </a:t>
+            </a:r>
+            <a:r>
+              <a:rPr lang="en-US" sz="2000" dirty="0" err="1">
+                <a:ea typeface="Inter"/>
+              </a:rPr>
+              <a:t>ülesanded</a:t>
+            </a:r>
+            <a:r>
+              <a:rPr lang="en-US" sz="2000" dirty="0">
+                <a:ea typeface="Inter"/>
+              </a:rPr>
+              <a:t>: Day7 --&gt; cafe_sales_analysis_tasks.txt</a:t>
+            </a:r>
+          </a:p>
+          <a:p>
+            <a:pPr marL="0" indent="0">
+              <a:lnSpc>
+                <a:spcPct val="150000"/>
+              </a:lnSpc>
+              <a:buNone/>
+            </a:pPr>
+            <a:endParaRPr lang="en-US" sz="2000" dirty="0">
+              <a:ea typeface="Inter"/>
+            </a:endParaRPr>
           </a:p>
         </p:txBody>
       </p:sp>
@@ -25156,622 +25362,6 @@
         <p:cNvPr id="1" name="">
           <a:extLst>
             <a:ext uri="{FF2B5EF4-FFF2-40B4-BE49-F238E27FC236}">
-              <a16:creationId xmlns:a16="http://schemas.microsoft.com/office/drawing/2014/main" id="{5A120294-3B0C-1FA8-EA29-F48F16C2F670}"/>
-            </a:ext>
-          </a:extLst>
-        </p:cNvPr>
-        <p:cNvGrpSpPr/>
-        <p:nvPr/>
-      </p:nvGrpSpPr>
-      <p:grpSpPr>
-        <a:xfrm>
-          <a:off x="0" y="0"/>
-          <a:ext cx="0" cy="0"/>
-          <a:chOff x="0" y="0"/>
-          <a:chExt cx="0" cy="0"/>
-        </a:xfrm>
-      </p:grpSpPr>
-      <p:sp>
-        <p:nvSpPr>
-          <p:cNvPr id="2" name="Title 1">
-            <a:extLst>
-              <a:ext uri="{FF2B5EF4-FFF2-40B4-BE49-F238E27FC236}">
-                <a16:creationId xmlns:a16="http://schemas.microsoft.com/office/drawing/2014/main" id="{087D87FE-C19E-B5D7-602C-B58CD8DC8460}"/>
-              </a:ext>
-            </a:extLst>
-          </p:cNvPr>
-          <p:cNvSpPr>
-            <a:spLocks noGrp="1"/>
-          </p:cNvSpPr>
-          <p:nvPr>
-            <p:ph type="ctrTitle"/>
-          </p:nvPr>
-        </p:nvSpPr>
-        <p:spPr/>
-        <p:txBody>
-          <a:bodyPr/>
-          <a:lstStyle/>
-          <a:p>
-            <a:r>
-              <a:rPr lang="en-US"/>
-              <a:t>SQL </a:t>
-            </a:r>
-            <a:r>
-              <a:rPr lang="en-US" err="1"/>
-              <a:t>päring</a:t>
-            </a:r>
-            <a:r>
-              <a:rPr lang="en-US"/>
-              <a:t> </a:t>
-            </a:r>
-            <a:r>
-              <a:rPr lang="en-US" err="1"/>
-              <a:t>müügiandmete</a:t>
-            </a:r>
-            <a:r>
-              <a:rPr lang="en-US"/>
-              <a:t> </a:t>
-            </a:r>
-            <a:r>
-              <a:rPr lang="en-US" err="1"/>
-              <a:t>analüüsiks</a:t>
-            </a:r>
-            <a:r>
-              <a:rPr lang="en-US"/>
-              <a:t> </a:t>
-            </a:r>
-          </a:p>
-        </p:txBody>
-      </p:sp>
-      <p:sp>
-        <p:nvSpPr>
-          <p:cNvPr id="5" name="Content Placeholder 4">
-            <a:extLst>
-              <a:ext uri="{FF2B5EF4-FFF2-40B4-BE49-F238E27FC236}">
-                <a16:creationId xmlns:a16="http://schemas.microsoft.com/office/drawing/2014/main" id="{E9CF221A-8E5D-03C4-56B6-F5CA02C825C0}"/>
-              </a:ext>
-            </a:extLst>
-          </p:cNvPr>
-          <p:cNvSpPr>
-            <a:spLocks noGrp="1"/>
-          </p:cNvSpPr>
-          <p:nvPr>
-            <p:ph sz="quarter" idx="10"/>
-          </p:nvPr>
-        </p:nvSpPr>
-        <p:spPr/>
-        <p:txBody>
-          <a:bodyPr/>
-          <a:lstStyle/>
-          <a:p>
-            <a:pPr marL="285750" indent="-285750">
-              <a:lnSpc>
-                <a:spcPct val="150000"/>
-              </a:lnSpc>
-            </a:pPr>
-            <a:r>
-              <a:rPr lang="en-US" sz="2000">
-                <a:ea typeface="Inter"/>
-                <a:cs typeface="+mn-lt"/>
-              </a:rPr>
-              <a:t>Leia </a:t>
-            </a:r>
-            <a:r>
-              <a:rPr lang="en-US" sz="2000" err="1">
-                <a:ea typeface="Inter"/>
-                <a:cs typeface="+mn-lt"/>
-              </a:rPr>
-              <a:t>müügisummad</a:t>
-            </a:r>
-            <a:r>
-              <a:rPr lang="en-US" sz="2000">
-                <a:ea typeface="Inter"/>
-                <a:cs typeface="+mn-lt"/>
-              </a:rPr>
-              <a:t> </a:t>
-            </a:r>
-            <a:r>
-              <a:rPr lang="en-US" sz="2000" err="1">
-                <a:ea typeface="Inter"/>
-                <a:cs typeface="+mn-lt"/>
-              </a:rPr>
-              <a:t>toodete</a:t>
-            </a:r>
-            <a:r>
-              <a:rPr lang="en-US" sz="2000">
-                <a:ea typeface="Inter"/>
-                <a:cs typeface="+mn-lt"/>
-              </a:rPr>
-              <a:t> </a:t>
-            </a:r>
-            <a:r>
-              <a:rPr lang="en-US" sz="2000" err="1">
-                <a:ea typeface="Inter"/>
-                <a:cs typeface="+mn-lt"/>
-              </a:rPr>
-              <a:t>kaupa</a:t>
-            </a:r>
-            <a:endParaRPr lang="en-US" sz="2000" err="1">
-              <a:cs typeface="+mn-lt"/>
-            </a:endParaRPr>
-          </a:p>
-          <a:p>
-            <a:pPr marL="285750" indent="-285750">
-              <a:lnSpc>
-                <a:spcPct val="150000"/>
-              </a:lnSpc>
-            </a:pPr>
-            <a:r>
-              <a:rPr lang="en-US" sz="2000">
-                <a:ea typeface="Inter"/>
-                <a:cs typeface="+mn-lt"/>
-              </a:rPr>
-              <a:t>Leia </a:t>
-            </a:r>
-            <a:r>
-              <a:rPr lang="en-US" sz="2000" err="1">
-                <a:ea typeface="Inter"/>
-                <a:cs typeface="+mn-lt"/>
-              </a:rPr>
-              <a:t>müügisummad</a:t>
-            </a:r>
-            <a:r>
-              <a:rPr lang="en-US" sz="2000">
-                <a:ea typeface="Inter"/>
-                <a:cs typeface="+mn-lt"/>
-              </a:rPr>
-              <a:t> </a:t>
-            </a:r>
-            <a:r>
-              <a:rPr lang="en-US" sz="2000" err="1">
-                <a:ea typeface="Inter"/>
-                <a:cs typeface="+mn-lt"/>
-              </a:rPr>
-              <a:t>klientide</a:t>
-            </a:r>
-            <a:r>
-              <a:rPr lang="en-US" sz="2000">
-                <a:ea typeface="Inter"/>
-                <a:cs typeface="+mn-lt"/>
-              </a:rPr>
-              <a:t> </a:t>
-            </a:r>
-            <a:r>
-              <a:rPr lang="en-US" sz="2000" err="1">
-                <a:ea typeface="Inter"/>
-                <a:cs typeface="+mn-lt"/>
-              </a:rPr>
-              <a:t>kaupa</a:t>
-            </a:r>
-            <a:endParaRPr lang="en-US" sz="2000" err="1">
-              <a:cs typeface="+mn-lt"/>
-            </a:endParaRPr>
-          </a:p>
-          <a:p>
-            <a:pPr marL="285750" indent="-285750">
-              <a:lnSpc>
-                <a:spcPct val="150000"/>
-              </a:lnSpc>
-              <a:buClr>
-                <a:srgbClr val="121212"/>
-              </a:buClr>
-            </a:pPr>
-            <a:r>
-              <a:rPr lang="en-US" sz="2000">
-                <a:ea typeface="Inter"/>
-                <a:cs typeface="+mn-lt"/>
-              </a:rPr>
-              <a:t>Leia </a:t>
-            </a:r>
-            <a:r>
-              <a:rPr lang="en-US" sz="2000" err="1">
-                <a:ea typeface="Inter"/>
-                <a:cs typeface="+mn-lt"/>
-              </a:rPr>
-              <a:t>müügisummad</a:t>
-            </a:r>
-            <a:r>
-              <a:rPr lang="en-US" sz="2000">
-                <a:ea typeface="Inter"/>
-                <a:cs typeface="+mn-lt"/>
-              </a:rPr>
-              <a:t> </a:t>
-            </a:r>
-            <a:r>
-              <a:rPr lang="en-US" sz="2000" err="1">
-                <a:ea typeface="Inter"/>
-                <a:cs typeface="+mn-lt"/>
-              </a:rPr>
-              <a:t>müügiesindajate</a:t>
-            </a:r>
-            <a:r>
-              <a:rPr lang="en-US" sz="2000">
-                <a:ea typeface="Inter"/>
-                <a:cs typeface="+mn-lt"/>
-              </a:rPr>
-              <a:t> </a:t>
-            </a:r>
-            <a:r>
-              <a:rPr lang="en-US" sz="2000" err="1">
-                <a:ea typeface="Inter"/>
-                <a:cs typeface="+mn-lt"/>
-              </a:rPr>
-              <a:t>kaupa</a:t>
-            </a:r>
-            <a:endParaRPr lang="en-US" sz="2000" err="1">
-              <a:cs typeface="+mn-lt"/>
-            </a:endParaRPr>
-          </a:p>
-          <a:p>
-            <a:pPr marL="285750" indent="-285750">
-              <a:lnSpc>
-                <a:spcPct val="150000"/>
-              </a:lnSpc>
-              <a:buClr>
-                <a:srgbClr val="121212"/>
-              </a:buClr>
-            </a:pPr>
-            <a:r>
-              <a:rPr lang="en-US" sz="2000">
-                <a:ea typeface="Inter"/>
-                <a:cs typeface="+mn-lt"/>
-              </a:rPr>
-              <a:t>Leia </a:t>
-            </a:r>
-            <a:r>
-              <a:rPr lang="en-US" sz="2000" err="1">
-                <a:ea typeface="Inter"/>
-                <a:cs typeface="+mn-lt"/>
-              </a:rPr>
-              <a:t>müügisummad</a:t>
-            </a:r>
-            <a:r>
-              <a:rPr lang="en-US" sz="2000">
-                <a:ea typeface="Inter"/>
-                <a:cs typeface="+mn-lt"/>
-              </a:rPr>
-              <a:t> </a:t>
-            </a:r>
-            <a:r>
-              <a:rPr lang="en-US" sz="2000" err="1">
-                <a:ea typeface="Inter"/>
-                <a:cs typeface="+mn-lt"/>
-              </a:rPr>
-              <a:t>aastate</a:t>
-            </a:r>
-            <a:r>
-              <a:rPr lang="en-US" sz="2000">
-                <a:ea typeface="Inter"/>
-                <a:cs typeface="+mn-lt"/>
-              </a:rPr>
-              <a:t> </a:t>
-            </a:r>
-            <a:r>
-              <a:rPr lang="en-US" sz="2000" err="1">
-                <a:ea typeface="Inter"/>
-                <a:cs typeface="+mn-lt"/>
-              </a:rPr>
-              <a:t>kaupa</a:t>
-            </a:r>
-            <a:endParaRPr lang="en-US" sz="2000">
-              <a:cs typeface="+mn-lt"/>
-            </a:endParaRPr>
-          </a:p>
-          <a:p>
-            <a:pPr marL="342900" indent="-342900">
-              <a:lnSpc>
-                <a:spcPct val="150000"/>
-              </a:lnSpc>
-              <a:buClr>
-                <a:srgbClr val="121212"/>
-              </a:buClr>
-            </a:pPr>
-            <a:r>
-              <a:rPr lang="en-US" sz="2000">
-                <a:ea typeface="Inter"/>
-                <a:cs typeface="+mn-lt"/>
-              </a:rPr>
-              <a:t>Lisa </a:t>
-            </a:r>
-            <a:r>
-              <a:rPr lang="en-US" sz="2000" err="1">
-                <a:ea typeface="Inter"/>
-                <a:cs typeface="+mn-lt"/>
-              </a:rPr>
-              <a:t>müükidele</a:t>
-            </a:r>
-            <a:r>
-              <a:rPr lang="en-US" sz="2000">
-                <a:ea typeface="Inter"/>
-                <a:cs typeface="+mn-lt"/>
-              </a:rPr>
-              <a:t> </a:t>
-            </a:r>
-            <a:r>
-              <a:rPr lang="en-US" sz="2000" err="1">
-                <a:ea typeface="Inter"/>
-                <a:cs typeface="+mn-lt"/>
-              </a:rPr>
-              <a:t>müügisumma</a:t>
-            </a:r>
-            <a:r>
-              <a:rPr lang="en-US" sz="2000">
-                <a:ea typeface="Inter"/>
-                <a:cs typeface="+mn-lt"/>
-              </a:rPr>
-              <a:t> </a:t>
-            </a:r>
-            <a:r>
-              <a:rPr lang="en-US" sz="2000" err="1">
-                <a:ea typeface="Inter"/>
-                <a:cs typeface="+mn-lt"/>
-              </a:rPr>
-              <a:t>kategooriad</a:t>
-            </a:r>
-            <a:endParaRPr lang="en-US" sz="2000" err="1">
-              <a:cs typeface="+mn-lt"/>
-            </a:endParaRPr>
-          </a:p>
-          <a:p>
-            <a:pPr marL="857250" lvl="1">
-              <a:lnSpc>
-                <a:spcPct val="150000"/>
-              </a:lnSpc>
-              <a:buAutoNum type="arabicPeriod"/>
-            </a:pPr>
-            <a:r>
-              <a:rPr lang="en-US" sz="2000">
-                <a:ea typeface="Inter"/>
-                <a:cs typeface="+mn-lt"/>
-              </a:rPr>
-              <a:t>Large Sale &gt; 500</a:t>
-            </a:r>
-            <a:endParaRPr lang="en-US" sz="2000">
-              <a:cs typeface="+mn-lt"/>
-            </a:endParaRPr>
-          </a:p>
-          <a:p>
-            <a:pPr marL="857250" lvl="1">
-              <a:lnSpc>
-                <a:spcPct val="150000"/>
-              </a:lnSpc>
-              <a:buAutoNum type="arabicPeriod"/>
-            </a:pPr>
-            <a:r>
-              <a:rPr lang="en-US" sz="2000">
-                <a:ea typeface="Inter"/>
-                <a:cs typeface="+mn-lt"/>
-              </a:rPr>
-              <a:t>Medium Sale &lt;= 500 and &gt;= 250</a:t>
-            </a:r>
-            <a:endParaRPr lang="en-US" sz="2000">
-              <a:cs typeface="+mn-lt"/>
-            </a:endParaRPr>
-          </a:p>
-          <a:p>
-            <a:pPr marL="857250" lvl="1">
-              <a:lnSpc>
-                <a:spcPct val="150000"/>
-              </a:lnSpc>
-              <a:buAutoNum type="arabicPeriod"/>
-            </a:pPr>
-            <a:r>
-              <a:rPr lang="en-US" sz="2000">
-                <a:ea typeface="Inter"/>
-                <a:cs typeface="+mn-lt"/>
-              </a:rPr>
-              <a:t>Small Sale &lt; 250</a:t>
-            </a:r>
-            <a:endParaRPr lang="en-US" sz="2000">
-              <a:cs typeface="+mn-lt"/>
-            </a:endParaRPr>
-          </a:p>
-          <a:p>
-            <a:pPr marL="342900" indent="-342900">
-              <a:lnSpc>
-                <a:spcPct val="150000"/>
-              </a:lnSpc>
-              <a:buClr>
-                <a:srgbClr val="121212"/>
-              </a:buClr>
-            </a:pPr>
-            <a:r>
-              <a:rPr lang="en-US" sz="2000">
-                <a:ea typeface="Inter"/>
-                <a:cs typeface="+mn-lt"/>
-              </a:rPr>
-              <a:t>Leia </a:t>
-            </a:r>
-            <a:r>
-              <a:rPr lang="en-US" sz="2000" err="1">
-                <a:ea typeface="Inter"/>
-                <a:cs typeface="+mn-lt"/>
-              </a:rPr>
-              <a:t>müükide</a:t>
-            </a:r>
-            <a:r>
-              <a:rPr lang="en-US" sz="2000">
-                <a:ea typeface="Inter"/>
-                <a:cs typeface="+mn-lt"/>
-              </a:rPr>
-              <a:t> </a:t>
-            </a:r>
-            <a:r>
-              <a:rPr lang="en-US" sz="2000" err="1">
-                <a:ea typeface="Inter"/>
-                <a:cs typeface="+mn-lt"/>
-              </a:rPr>
-              <a:t>arv</a:t>
-            </a:r>
-            <a:r>
-              <a:rPr lang="en-US" sz="2000">
-                <a:ea typeface="Inter"/>
-                <a:cs typeface="+mn-lt"/>
-              </a:rPr>
-              <a:t> ja </a:t>
-            </a:r>
-            <a:r>
-              <a:rPr lang="en-US" sz="2000" err="1">
-                <a:ea typeface="Inter"/>
-                <a:cs typeface="+mn-lt"/>
-              </a:rPr>
-              <a:t>müügisumma</a:t>
-            </a:r>
-            <a:r>
-              <a:rPr lang="en-US" sz="2000">
-                <a:ea typeface="Inter"/>
-                <a:cs typeface="+mn-lt"/>
-              </a:rPr>
-              <a:t> </a:t>
-            </a:r>
-            <a:r>
-              <a:rPr lang="en-US" sz="2000" err="1">
-                <a:ea typeface="Inter"/>
-                <a:cs typeface="+mn-lt"/>
-              </a:rPr>
-              <a:t>müügisumma</a:t>
-            </a:r>
-            <a:r>
-              <a:rPr lang="en-US" sz="2000">
-                <a:ea typeface="Inter"/>
-                <a:cs typeface="+mn-lt"/>
-              </a:rPr>
-              <a:t> </a:t>
-            </a:r>
-            <a:r>
-              <a:rPr lang="en-US" sz="2000" err="1">
-                <a:ea typeface="Inter"/>
-                <a:cs typeface="+mn-lt"/>
-              </a:rPr>
-              <a:t>kategooriate</a:t>
-            </a:r>
-            <a:r>
-              <a:rPr lang="en-US" sz="2000">
-                <a:ea typeface="Inter"/>
-                <a:cs typeface="+mn-lt"/>
-              </a:rPr>
-              <a:t> </a:t>
-            </a:r>
-            <a:r>
-              <a:rPr lang="en-US" sz="2000" err="1">
-                <a:ea typeface="Inter"/>
-                <a:cs typeface="+mn-lt"/>
-              </a:rPr>
-              <a:t>kaupa</a:t>
-            </a:r>
-            <a:endParaRPr lang="en-US" sz="2000" err="1">
-              <a:cs typeface="+mn-lt"/>
-            </a:endParaRPr>
-          </a:p>
-          <a:p>
-            <a:pPr marL="342900" indent="-342900">
-              <a:lnSpc>
-                <a:spcPct val="150000"/>
-              </a:lnSpc>
-              <a:buClr>
-                <a:srgbClr val="121212"/>
-              </a:buClr>
-            </a:pPr>
-            <a:r>
-              <a:rPr lang="en-US" sz="2000">
-                <a:ea typeface="Inter"/>
-                <a:cs typeface="+mn-lt"/>
-              </a:rPr>
-              <a:t>Mida </a:t>
-            </a:r>
-            <a:r>
-              <a:rPr lang="en-US" sz="2000" err="1">
-                <a:ea typeface="Inter"/>
-                <a:cs typeface="+mn-lt"/>
-              </a:rPr>
-              <a:t>veel</a:t>
-            </a:r>
-            <a:r>
-              <a:rPr lang="en-US" sz="2000">
-                <a:ea typeface="Inter"/>
-                <a:cs typeface="+mn-lt"/>
-              </a:rPr>
-              <a:t> </a:t>
-            </a:r>
-            <a:r>
-              <a:rPr lang="en-US" sz="2000" err="1">
-                <a:ea typeface="Inter"/>
-                <a:cs typeface="+mn-lt"/>
-              </a:rPr>
-              <a:t>võiks</a:t>
-            </a:r>
-            <a:r>
-              <a:rPr lang="en-US" sz="2000">
-                <a:ea typeface="Inter"/>
-                <a:cs typeface="+mn-lt"/>
-              </a:rPr>
-              <a:t> </a:t>
-            </a:r>
-            <a:r>
-              <a:rPr lang="en-US" sz="2000" err="1">
-                <a:ea typeface="Inter"/>
-                <a:cs typeface="+mn-lt"/>
-              </a:rPr>
-              <a:t>leida</a:t>
-            </a:r>
-            <a:r>
-              <a:rPr lang="en-US" sz="2000">
-                <a:ea typeface="Inter"/>
-                <a:cs typeface="+mn-lt"/>
-              </a:rPr>
-              <a:t>?</a:t>
-            </a:r>
-            <a:endParaRPr lang="en-US" sz="2000">
-              <a:cs typeface="+mn-lt"/>
-            </a:endParaRPr>
-          </a:p>
-          <a:p>
-            <a:pPr marL="857250" lvl="1" indent="-342900">
-              <a:lnSpc>
-                <a:spcPct val="150000"/>
-              </a:lnSpc>
-              <a:buAutoNum type="arabicPeriod"/>
-            </a:pPr>
-            <a:endParaRPr lang="en-US">
-              <a:cs typeface="+mn-lt"/>
-            </a:endParaRPr>
-          </a:p>
-          <a:p>
-            <a:pPr marL="0" indent="0">
-              <a:buNone/>
-            </a:pPr>
-            <a:endParaRPr lang="en-US">
-              <a:cs typeface="+mn-lt"/>
-            </a:endParaRPr>
-          </a:p>
-          <a:p>
-            <a:endParaRPr lang="en-US">
-              <a:cs typeface="+mn-lt"/>
-            </a:endParaRPr>
-          </a:p>
-        </p:txBody>
-      </p:sp>
-    </p:spTree>
-    <p:extLst>
-      <p:ext uri="{BB962C8B-B14F-4D97-AF65-F5344CB8AC3E}">
-        <p14:creationId xmlns:p14="http://schemas.microsoft.com/office/powerpoint/2010/main" val="4264120663"/>
-      </p:ext>
-    </p:extLst>
-  </p:cSld>
-  <p:clrMapOvr>
-    <a:masterClrMapping/>
-  </p:clrMapOvr>
-</p:sld>
-</file>
-
-<file path=ppt/slides/slide6.xml><?xml version="1.0" encoding="utf-8"?>
-<p:sld xmlns:a="http://schemas.openxmlformats.org/drawingml/2006/main" xmlns:r="http://schemas.openxmlformats.org/officeDocument/2006/relationships" xmlns:p="http://schemas.openxmlformats.org/presentationml/2006/main">
-  <p:cSld>
-    <p:spTree>
-      <p:nvGrpSpPr>
-        <p:cNvPr id="1" name="">
-          <a:extLst>
-            <a:ext uri="{FF2B5EF4-FFF2-40B4-BE49-F238E27FC236}">
               <a16:creationId xmlns:a16="http://schemas.microsoft.com/office/drawing/2014/main" id="{024643B3-EEBB-CCD6-9D3C-074D146254EF}"/>
             </a:ext>
           </a:extLst>
@@ -25854,69 +25444,62 @@
               </a:lnSpc>
             </a:pPr>
             <a:r>
-              <a:rPr lang="en-US" sz="2000" err="1">
+              <a:rPr lang="en-US" sz="2000" dirty="0">
                 <a:ea typeface="Inter"/>
                 <a:cs typeface="+mn-lt"/>
               </a:rPr>
-              <a:t>Vaatame</a:t>
+              <a:t>Vaatame </a:t>
             </a:r>
             <a:r>
-              <a:rPr lang="en-US" sz="2000">
+              <a:rPr lang="en-US" sz="2000" dirty="0" err="1">
+                <a:ea typeface="Inter"/>
+                <a:cs typeface="+mn-lt"/>
+              </a:rPr>
+              <a:t>üle</a:t>
+            </a:r>
+            <a:r>
+              <a:rPr lang="en-US" sz="2000" dirty="0">
                 <a:ea typeface="Inter"/>
                 <a:cs typeface="+mn-lt"/>
               </a:rPr>
               <a:t> </a:t>
             </a:r>
             <a:r>
-              <a:rPr lang="en-US" sz="2000" err="1">
+              <a:rPr lang="en-US" sz="2000" dirty="0" err="1">
                 <a:ea typeface="Inter"/>
                 <a:cs typeface="+mn-lt"/>
               </a:rPr>
-              <a:t>üle</a:t>
+              <a:t>kohviku</a:t>
             </a:r>
             <a:r>
-              <a:rPr lang="en-US" sz="2000">
+              <a:rPr lang="en-US" sz="2000" dirty="0">
                 <a:ea typeface="Inter"/>
                 <a:cs typeface="+mn-lt"/>
               </a:rPr>
               <a:t> </a:t>
             </a:r>
             <a:r>
-              <a:rPr lang="en-US" sz="2000" err="1">
+              <a:rPr lang="en-US" sz="2000" dirty="0" err="1">
                 <a:ea typeface="Inter"/>
                 <a:cs typeface="+mn-lt"/>
               </a:rPr>
-              <a:t>müügiandmete</a:t>
+              <a:t>analüüsi</a:t>
             </a:r>
             <a:r>
-              <a:rPr lang="en-US" sz="2000">
+              <a:rPr lang="en-US" sz="2000" dirty="0">
                 <a:ea typeface="Inter"/>
                 <a:cs typeface="+mn-lt"/>
               </a:rPr>
               <a:t> </a:t>
             </a:r>
             <a:r>
-              <a:rPr lang="en-US" sz="2000" err="1">
-                <a:ea typeface="Inter"/>
-                <a:cs typeface="+mn-lt"/>
-              </a:rPr>
-              <a:t>kokkuvõtete</a:t>
-            </a:r>
-            <a:r>
-              <a:rPr lang="en-US" sz="2000">
-                <a:ea typeface="Inter"/>
-                <a:cs typeface="+mn-lt"/>
-              </a:rPr>
-              <a:t> </a:t>
-            </a:r>
-            <a:r>
-              <a:rPr lang="en-US" sz="2000" err="1">
+              <a:rPr lang="en-US" sz="2000" dirty="0" err="1">
                 <a:ea typeface="Inter"/>
                 <a:cs typeface="+mn-lt"/>
               </a:rPr>
               <a:t>lahendused</a:t>
             </a:r>
-            <a:endParaRPr lang="en-US" sz="2000" err="1">
+            <a:endParaRPr lang="en-US" sz="2000" dirty="0">
               <a:cs typeface="+mn-lt"/>
             </a:endParaRPr>
           </a:p>
@@ -25926,7 +25509,7 @@
                 <a:spcPct val="150000"/>
               </a:lnSpc>
             </a:pPr>
-            <a:endParaRPr lang="en-US">
+            <a:endParaRPr lang="en-US" dirty="0">
               <a:cs typeface="+mn-lt"/>
             </a:endParaRPr>
           </a:p>
@@ -25934,12 +25517,12 @@
             <a:pPr marL="0" indent="0">
               <a:buNone/>
             </a:pPr>
-            <a:endParaRPr lang="en-US">
+            <a:endParaRPr lang="en-US" dirty="0">
               <a:cs typeface="+mn-lt"/>
             </a:endParaRPr>
           </a:p>
           <a:p>
-            <a:endParaRPr lang="en-US">
+            <a:endParaRPr lang="en-US" dirty="0">
               <a:cs typeface="+mn-lt"/>
             </a:endParaRPr>
           </a:p>
@@ -25958,7 +25541,7 @@
 </p:sld>
 </file>
 
-<file path=ppt/slides/slide7.xml><?xml version="1.0" encoding="utf-8"?>
+<file path=ppt/slides/slide6.xml><?xml version="1.0" encoding="utf-8"?>
 <p:sld xmlns:a="http://schemas.openxmlformats.org/drawingml/2006/main" xmlns:r="http://schemas.openxmlformats.org/officeDocument/2006/relationships" xmlns:p="http://schemas.openxmlformats.org/presentationml/2006/main">
   <p:cSld>
     <p:spTree>
@@ -26224,7 +25807,7 @@
 </p:sld>
 </file>
 
-<file path=ppt/slides/slide8.xml><?xml version="1.0" encoding="utf-8"?>
+<file path=ppt/slides/slide7.xml><?xml version="1.0" encoding="utf-8"?>
 <p:sld xmlns:a="http://schemas.openxmlformats.org/drawingml/2006/main" xmlns:r="http://schemas.openxmlformats.org/officeDocument/2006/relationships" xmlns:p="http://schemas.openxmlformats.org/presentationml/2006/main">
   <p:cSld>
     <p:spTree>
@@ -27133,15 +26716,6 @@
 </file>
 
 <file path=customXml/item1.xml><?xml version="1.0" encoding="utf-8"?>
-<?mso-contentType ?>
-<FormTemplates xmlns="http://schemas.microsoft.com/sharepoint/v3/contenttype/forms">
-  <Display>DocumentLibraryForm</Display>
-  <Edit>DocumentLibraryForm</Edit>
-  <New>DocumentLibraryForm</New>
-</FormTemplates>
-</file>
-
-<file path=customXml/item2.xml><?xml version="1.0" encoding="utf-8"?>
 <ct:contentTypeSchema xmlns:ct="http://schemas.microsoft.com/office/2006/metadata/contentType" xmlns:ma="http://schemas.microsoft.com/office/2006/metadata/properties/metaAttributes" ct:_="" ma:_="" ma:contentTypeName="Document" ma:contentTypeID="0x010100C4D27B8FA8976546BCD79313C588588D" ma:contentTypeVersion="8" ma:contentTypeDescription="Create a new document." ma:contentTypeScope="" ma:versionID="a112c56f6fe148a79025c76584832af0">
   <xsd:schema xmlns:xsd="http://www.w3.org/2001/XMLSchema" xmlns:xs="http://www.w3.org/2001/XMLSchema" xmlns:p="http://schemas.microsoft.com/office/2006/metadata/properties" xmlns:ns2="a1a2d923-8fea-42f1-bd41-9cdfff65694e" targetNamespace="http://schemas.microsoft.com/office/2006/metadata/properties" ma:root="true" ma:fieldsID="97c8655d467eaa9470a714421e7268c0" ns2:_="">
     <xsd:import namespace="a1a2d923-8fea-42f1-bd41-9cdfff65694e"/>
@@ -27309,6 +26883,15 @@
 </ct:contentTypeSchema>
 </file>
 
+<file path=customXml/item2.xml><?xml version="1.0" encoding="utf-8"?>
+<?mso-contentType ?>
+<FormTemplates xmlns="http://schemas.microsoft.com/sharepoint/v3/contenttype/forms">
+  <Display>DocumentLibraryForm</Display>
+  <Edit>DocumentLibraryForm</Edit>
+  <New>DocumentLibraryForm</New>
+</FormTemplates>
+</file>
+
 <file path=customXml/item3.xml><?xml version="1.0" encoding="utf-8"?>
 <p:properties xmlns:p="http://schemas.microsoft.com/office/2006/metadata/properties" xmlns:xsi="http://www.w3.org/2001/XMLSchema-instance" xmlns:pc="http://schemas.microsoft.com/office/infopath/2007/PartnerControls">
   <documentManagement/>
@@ -27316,14 +26899,6 @@
 </file>
 
 <file path=customXml/itemProps1.xml><?xml version="1.0" encoding="utf-8"?>
-<ds:datastoreItem xmlns:ds="http://schemas.openxmlformats.org/officeDocument/2006/customXml" ds:itemID="{9DC439CA-6F1C-4005-ACA6-A52E04DEE0A7}">
-  <ds:schemaRefs>
-    <ds:schemaRef ds:uri="http://schemas.microsoft.com/sharepoint/v3/contenttype/forms"/>
-  </ds:schemaRefs>
-</ds:datastoreItem>
-</file>
-
-<file path=customXml/itemProps2.xml><?xml version="1.0" encoding="utf-8"?>
 <ds:datastoreItem xmlns:ds="http://schemas.openxmlformats.org/officeDocument/2006/customXml" ds:itemID="{9CF4F972-2392-44D0-AA45-41AC4FDC4A59}">
   <ds:schemaRefs>
     <ds:schemaRef ds:uri="a1a2d923-8fea-42f1-bd41-9cdfff65694e"/>
@@ -27341,6 +26916,14 @@
 </ds:datastoreItem>
 </file>
 
+<file path=customXml/itemProps2.xml><?xml version="1.0" encoding="utf-8"?>
+<ds:datastoreItem xmlns:ds="http://schemas.openxmlformats.org/officeDocument/2006/customXml" ds:itemID="{9DC439CA-6F1C-4005-ACA6-A52E04DEE0A7}">
+  <ds:schemaRefs>
+    <ds:schemaRef ds:uri="http://schemas.microsoft.com/sharepoint/v3/contenttype/forms"/>
+  </ds:schemaRefs>
+</ds:datastoreItem>
+</file>
+
 <file path=customXml/itemProps3.xml><?xml version="1.0" encoding="utf-8"?>
 <ds:datastoreItem xmlns:ds="http://schemas.openxmlformats.org/officeDocument/2006/customXml" ds:itemID="{5BDF4908-A52A-47DD-A794-6E02D71942FC}">
   <ds:schemaRefs>

--- a/Day7/7-paev-andmetarkus-esitlus.pptx
+++ b/Day7/7-paev-andmetarkus-esitlus.pptx
@@ -5,10 +5,10 @@
     <p:sldMasterId id="2147483648" r:id="rId4"/>
   </p:sldMasterIdLst>
   <p:notesMasterIdLst>
-    <p:notesMasterId r:id="rId12"/>
+    <p:notesMasterId r:id="rId13"/>
   </p:notesMasterIdLst>
   <p:handoutMasterIdLst>
-    <p:handoutMasterId r:id="rId13"/>
+    <p:handoutMasterId r:id="rId14"/>
   </p:handoutMasterIdLst>
   <p:sldIdLst>
     <p:sldId id="417" r:id="rId5"/>
@@ -16,25 +16,26 @@
     <p:sldId id="641" r:id="rId7"/>
     <p:sldId id="559" r:id="rId8"/>
     <p:sldId id="611" r:id="rId9"/>
-    <p:sldId id="560" r:id="rId10"/>
-    <p:sldId id="561" r:id="rId11"/>
+    <p:sldId id="490" r:id="rId10"/>
+    <p:sldId id="560" r:id="rId11"/>
+    <p:sldId id="561" r:id="rId12"/>
   </p:sldIdLst>
   <p:sldSz cx="12192000" cy="6858000"/>
   <p:notesSz cx="6858000" cy="9144000"/>
   <p:embeddedFontLst>
     <p:embeddedFont>
       <p:font typeface="Inter" panose="020B0604020202020204" charset="0"/>
-      <p:regular r:id="rId14"/>
-      <p:bold r:id="rId15"/>
+      <p:regular r:id="rId15"/>
+      <p:bold r:id="rId16"/>
     </p:embeddedFont>
     <p:embeddedFont>
       <p:font typeface="Inter Bold" panose="020B0604020202020204" charset="0"/>
-      <p:bold r:id="rId16"/>
+      <p:bold r:id="rId17"/>
     </p:embeddedFont>
     <p:embeddedFont>
       <p:font typeface="Poppins SemiBold" panose="00000700000000000000" pitchFamily="2" charset="0"/>
-      <p:bold r:id="rId17"/>
-      <p:boldItalic r:id="rId18"/>
+      <p:bold r:id="rId18"/>
+      <p:boldItalic r:id="rId19"/>
     </p:embeddedFont>
   </p:embeddedFontLst>
   <p:defaultTextStyle>
@@ -146,7 +147,7 @@
 <file path=ppt/revisionInfo.xml><?xml version="1.0" encoding="utf-8"?>
 <p1510:revInfo xmlns:a="http://schemas.openxmlformats.org/drawingml/2006/main" xmlns:r="http://schemas.openxmlformats.org/officeDocument/2006/relationships" xmlns:p1510="http://schemas.microsoft.com/office/powerpoint/2015/10/main">
   <p1510:revLst>
-    <p1510:client id="{65D81BF4-4944-4E0E-85AE-1DD611A6ECD5}" v="1" dt="2026-04-07T14:17:43.546"/>
+    <p1510:client id="{65D81BF4-4944-4E0E-85AE-1DD611A6ECD5}" v="2" dt="2026-04-07T19:25:17.938"/>
   </p1510:revLst>
 </p1510:revInfo>
 </file>
@@ -155,8 +156,8 @@
 <pc:chgInfo xmlns:a="http://schemas.openxmlformats.org/drawingml/2006/main" xmlns:r="http://schemas.openxmlformats.org/officeDocument/2006/relationships" xmlns:ac="http://schemas.microsoft.com/office/drawing/2013/main/command" xmlns:pc="http://schemas.microsoft.com/office/powerpoint/2013/main/command">
   <pc:docChgLst>
     <pc:chgData name="Virve Räni" userId="161a7437-7ef4-49ec-91bf-54882f313dfe" providerId="ADAL" clId="{6D754EED-65AA-4A21-B175-6769012CF487}"/>
-    <pc:docChg chg="undo custSel delSld modSld">
-      <pc:chgData name="Virve Räni" userId="161a7437-7ef4-49ec-91bf-54882f313dfe" providerId="ADAL" clId="{6D754EED-65AA-4A21-B175-6769012CF487}" dt="2026-04-07T14:28:21.429" v="377" actId="20577"/>
+    <pc:docChg chg="undo custSel addSld delSld modSld">
+      <pc:chgData name="Virve Räni" userId="161a7437-7ef4-49ec-91bf-54882f313dfe" providerId="ADAL" clId="{6D754EED-65AA-4A21-B175-6769012CF487}" dt="2026-04-07T19:25:56.167" v="503" actId="20577"/>
       <pc:docMkLst>
         <pc:docMk/>
       </pc:docMkLst>
@@ -183,6 +184,29 @@
           </ac:graphicFrameMkLst>
         </pc:graphicFrameChg>
       </pc:sldChg>
+      <pc:sldChg chg="modSp add mod">
+        <pc:chgData name="Virve Räni" userId="161a7437-7ef4-49ec-91bf-54882f313dfe" providerId="ADAL" clId="{6D754EED-65AA-4A21-B175-6769012CF487}" dt="2026-04-07T19:25:56.167" v="503" actId="20577"/>
+        <pc:sldMkLst>
+          <pc:docMk/>
+          <pc:sldMk cId="1821779248" sldId="490"/>
+        </pc:sldMkLst>
+        <pc:spChg chg="mod">
+          <ac:chgData name="Virve Räni" userId="161a7437-7ef4-49ec-91bf-54882f313dfe" providerId="ADAL" clId="{6D754EED-65AA-4A21-B175-6769012CF487}" dt="2026-04-07T19:25:28.564" v="401" actId="20577"/>
+          <ac:spMkLst>
+            <pc:docMk/>
+            <pc:sldMk cId="1821779248" sldId="490"/>
+            <ac:spMk id="2" creationId="{A6F7ECAB-F0C6-2BD9-091C-411E05342EE7}"/>
+          </ac:spMkLst>
+        </pc:spChg>
+        <pc:spChg chg="mod">
+          <ac:chgData name="Virve Räni" userId="161a7437-7ef4-49ec-91bf-54882f313dfe" providerId="ADAL" clId="{6D754EED-65AA-4A21-B175-6769012CF487}" dt="2026-04-07T19:25:56.167" v="503" actId="20577"/>
+          <ac:spMkLst>
+            <pc:docMk/>
+            <pc:sldMk cId="1821779248" sldId="490"/>
+            <ac:spMk id="5" creationId="{914C68BD-2977-9852-E4B4-C0021262709D}"/>
+          </ac:spMkLst>
+        </pc:spChg>
+      </pc:sldChg>
       <pc:sldChg chg="del">
         <pc:chgData name="Virve Räni" userId="161a7437-7ef4-49ec-91bf-54882f313dfe" providerId="ADAL" clId="{6D754EED-65AA-4A21-B175-6769012CF487}" dt="2026-04-07T14:12:45.032" v="160" actId="47"/>
         <pc:sldMkLst>
@@ -190,18 +214,34 @@
           <pc:sldMk cId="4264120663" sldId="492"/>
         </pc:sldMkLst>
       </pc:sldChg>
-      <pc:sldChg chg="modSp mod">
-        <pc:chgData name="Virve Räni" userId="161a7437-7ef4-49ec-91bf-54882f313dfe" providerId="ADAL" clId="{6D754EED-65AA-4A21-B175-6769012CF487}" dt="2026-04-07T14:12:54.449" v="177" actId="20577"/>
+      <pc:sldChg chg="addSp delSp modSp mod">
+        <pc:chgData name="Virve Räni" userId="161a7437-7ef4-49ec-91bf-54882f313dfe" providerId="ADAL" clId="{6D754EED-65AA-4A21-B175-6769012CF487}" dt="2026-04-07T19:25:00.364" v="381" actId="22"/>
         <pc:sldMkLst>
           <pc:docMk/>
           <pc:sldMk cId="3870796602" sldId="611"/>
         </pc:sldMkLst>
+        <pc:spChg chg="add del">
+          <ac:chgData name="Virve Räni" userId="161a7437-7ef4-49ec-91bf-54882f313dfe" providerId="ADAL" clId="{6D754EED-65AA-4A21-B175-6769012CF487}" dt="2026-04-07T19:24:31.189" v="379" actId="22"/>
+          <ac:spMkLst>
+            <pc:docMk/>
+            <pc:sldMk cId="3870796602" sldId="611"/>
+            <ac:spMk id="4" creationId="{9DFDFF9B-546C-04F4-1A85-1B6A161326D5}"/>
+          </ac:spMkLst>
+        </pc:spChg>
         <pc:spChg chg="mod">
           <ac:chgData name="Virve Räni" userId="161a7437-7ef4-49ec-91bf-54882f313dfe" providerId="ADAL" clId="{6D754EED-65AA-4A21-B175-6769012CF487}" dt="2026-04-07T14:12:54.449" v="177" actId="20577"/>
           <ac:spMkLst>
             <pc:docMk/>
             <pc:sldMk cId="3870796602" sldId="611"/>
             <ac:spMk id="5" creationId="{F9557069-2E5E-8598-EF63-D471222B02C7}"/>
+          </ac:spMkLst>
+        </pc:spChg>
+        <pc:spChg chg="add del">
+          <ac:chgData name="Virve Räni" userId="161a7437-7ef4-49ec-91bf-54882f313dfe" providerId="ADAL" clId="{6D754EED-65AA-4A21-B175-6769012CF487}" dt="2026-04-07T19:25:00.364" v="381" actId="22"/>
+          <ac:spMkLst>
+            <pc:docMk/>
+            <pc:sldMk cId="3870796602" sldId="611"/>
+            <ac:spMk id="7" creationId="{A107516A-B454-318B-AAC4-9D65206FEE63}"/>
           </ac:spMkLst>
         </pc:spChg>
       </pc:sldChg>
@@ -25549,6 +25589,399 @@
         <p:cNvPr id="1" name="">
           <a:extLst>
             <a:ext uri="{FF2B5EF4-FFF2-40B4-BE49-F238E27FC236}">
+              <a16:creationId xmlns:a16="http://schemas.microsoft.com/office/drawing/2014/main" id="{AC617CE0-EED5-7349-1A94-2995DC5D7708}"/>
+            </a:ext>
+          </a:extLst>
+        </p:cNvPr>
+        <p:cNvGrpSpPr/>
+        <p:nvPr/>
+      </p:nvGrpSpPr>
+      <p:grpSpPr>
+        <a:xfrm>
+          <a:off x="0" y="0"/>
+          <a:ext cx="0" cy="0"/>
+          <a:chOff x="0" y="0"/>
+          <a:chExt cx="0" cy="0"/>
+        </a:xfrm>
+      </p:grpSpPr>
+      <p:sp>
+        <p:nvSpPr>
+          <p:cNvPr id="2" name="Title 1">
+            <a:extLst>
+              <a:ext uri="{FF2B5EF4-FFF2-40B4-BE49-F238E27FC236}">
+                <a16:creationId xmlns:a16="http://schemas.microsoft.com/office/drawing/2014/main" id="{A6F7ECAB-F0C6-2BD9-091C-411E05342EE7}"/>
+              </a:ext>
+            </a:extLst>
+          </p:cNvPr>
+          <p:cNvSpPr>
+            <a:spLocks noGrp="1"/>
+          </p:cNvSpPr>
+          <p:nvPr>
+            <p:ph type="ctrTitle"/>
+          </p:nvPr>
+        </p:nvSpPr>
+        <p:spPr/>
+        <p:txBody>
+          <a:bodyPr/>
+          <a:lstStyle/>
+          <a:p>
+            <a:r>
+              <a:rPr lang="en-US" dirty="0"/>
+              <a:t>Visual Studio Code SQL </a:t>
+            </a:r>
+            <a:r>
+              <a:rPr lang="en-US" dirty="0" err="1"/>
+              <a:t>jooksutamiseks</a:t>
+            </a:r>
+            <a:endParaRPr lang="en-US" dirty="0"/>
+          </a:p>
+        </p:txBody>
+      </p:sp>
+      <p:sp>
+        <p:nvSpPr>
+          <p:cNvPr id="5" name="Content Placeholder 4">
+            <a:extLst>
+              <a:ext uri="{FF2B5EF4-FFF2-40B4-BE49-F238E27FC236}">
+                <a16:creationId xmlns:a16="http://schemas.microsoft.com/office/drawing/2014/main" id="{914C68BD-2977-9852-E4B4-C0021262709D}"/>
+              </a:ext>
+            </a:extLst>
+          </p:cNvPr>
+          <p:cNvSpPr>
+            <a:spLocks noGrp="1"/>
+          </p:cNvSpPr>
+          <p:nvPr>
+            <p:ph sz="quarter" idx="10"/>
+          </p:nvPr>
+        </p:nvSpPr>
+        <p:spPr/>
+        <p:txBody>
+          <a:bodyPr/>
+          <a:lstStyle/>
+          <a:p>
+            <a:pPr marL="285750" indent="-285750">
+              <a:lnSpc>
+                <a:spcPct val="150000"/>
+              </a:lnSpc>
+            </a:pPr>
+            <a:r>
+              <a:rPr lang="en-US" sz="2000" dirty="0" err="1">
+                <a:ea typeface="Inter"/>
+                <a:cs typeface="+mn-lt"/>
+              </a:rPr>
+              <a:t>Andmebaasi</a:t>
+            </a:r>
+            <a:r>
+              <a:rPr lang="en-US" sz="2000" dirty="0">
+                <a:ea typeface="Inter"/>
+                <a:cs typeface="+mn-lt"/>
+              </a:rPr>
+              <a:t> </a:t>
+            </a:r>
+            <a:r>
+              <a:rPr lang="en-US" sz="2000" dirty="0" err="1">
+                <a:ea typeface="Inter"/>
+                <a:cs typeface="+mn-lt"/>
+              </a:rPr>
+              <a:t>ühendus</a:t>
+            </a:r>
+            <a:endParaRPr lang="en-US" sz="2000" dirty="0">
+              <a:ea typeface="Inter"/>
+              <a:cs typeface="+mn-lt"/>
+            </a:endParaRPr>
+          </a:p>
+          <a:p>
+            <a:pPr marL="800100" lvl="1">
+              <a:lnSpc>
+                <a:spcPct val="150000"/>
+              </a:lnSpc>
+            </a:pPr>
+            <a:r>
+              <a:rPr lang="en-US" sz="2000" dirty="0">
+                <a:ea typeface="Inter"/>
+                <a:cs typeface="+mn-lt"/>
+              </a:rPr>
+              <a:t>Extensions </a:t>
+            </a:r>
+            <a:r>
+              <a:rPr lang="en-US" sz="2000" dirty="0">
+                <a:ea typeface="Inter"/>
+                <a:cs typeface="+mn-lt"/>
+                <a:sym typeface="Wingdings" panose="05000000000000000000" pitchFamily="2" charset="2"/>
+              </a:rPr>
+              <a:t> PostgreSQL Client for Visual Studio Code</a:t>
+            </a:r>
+          </a:p>
+          <a:p>
+            <a:pPr marL="800100" lvl="1">
+              <a:lnSpc>
+                <a:spcPct val="150000"/>
+              </a:lnSpc>
+            </a:pPr>
+            <a:r>
+              <a:rPr lang="en-US" sz="2000" dirty="0" err="1">
+                <a:ea typeface="Inter"/>
+                <a:cs typeface="+mn-lt"/>
+                <a:sym typeface="Wingdings" panose="05000000000000000000" pitchFamily="2" charset="2"/>
+              </a:rPr>
+              <a:t>Ilmub</a:t>
+            </a:r>
+            <a:r>
+              <a:rPr lang="en-US" sz="2000" dirty="0">
+                <a:ea typeface="Inter"/>
+                <a:cs typeface="+mn-lt"/>
+                <a:sym typeface="Wingdings" panose="05000000000000000000" pitchFamily="2" charset="2"/>
+              </a:rPr>
+              <a:t> </a:t>
+            </a:r>
+            <a:r>
+              <a:rPr lang="en-US" sz="2000" dirty="0" err="1">
+                <a:ea typeface="Inter"/>
+                <a:cs typeface="+mn-lt"/>
+                <a:sym typeface="Wingdings" panose="05000000000000000000" pitchFamily="2" charset="2"/>
+              </a:rPr>
+              <a:t>vasakule</a:t>
+            </a:r>
+            <a:r>
+              <a:rPr lang="en-US" sz="2000" dirty="0">
+                <a:ea typeface="Inter"/>
+                <a:cs typeface="+mn-lt"/>
+                <a:sym typeface="Wingdings" panose="05000000000000000000" pitchFamily="2" charset="2"/>
+              </a:rPr>
+              <a:t> “Databases” </a:t>
+            </a:r>
+            <a:r>
+              <a:rPr lang="en-US" sz="2000" dirty="0" err="1">
+                <a:ea typeface="Inter"/>
+                <a:cs typeface="+mn-lt"/>
+                <a:sym typeface="Wingdings" panose="05000000000000000000" pitchFamily="2" charset="2"/>
+              </a:rPr>
+              <a:t>valik</a:t>
+            </a:r>
+            <a:r>
+              <a:rPr lang="en-US" sz="2000" dirty="0">
+                <a:ea typeface="Inter"/>
+                <a:cs typeface="+mn-lt"/>
+                <a:sym typeface="Wingdings" panose="05000000000000000000" pitchFamily="2" charset="2"/>
+              </a:rPr>
+              <a:t> </a:t>
+            </a:r>
+          </a:p>
+          <a:p>
+            <a:pPr marL="1200150" lvl="2">
+              <a:lnSpc>
+                <a:spcPct val="150000"/>
+              </a:lnSpc>
+            </a:pPr>
+            <a:r>
+              <a:rPr lang="en-US" sz="2000" dirty="0" err="1">
+                <a:ea typeface="Inter"/>
+                <a:cs typeface="+mn-lt"/>
+                <a:sym typeface="Wingdings" panose="05000000000000000000" pitchFamily="2" charset="2"/>
+              </a:rPr>
+              <a:t>Ühendume</a:t>
+            </a:r>
+            <a:r>
+              <a:rPr lang="en-US" sz="2000" dirty="0">
+                <a:ea typeface="Inter"/>
+                <a:cs typeface="+mn-lt"/>
+                <a:sym typeface="Wingdings" panose="05000000000000000000" pitchFamily="2" charset="2"/>
+              </a:rPr>
+              <a:t> </a:t>
+            </a:r>
+            <a:r>
+              <a:rPr lang="en-US" sz="2000" dirty="0" err="1">
+                <a:ea typeface="Inter"/>
+                <a:cs typeface="+mn-lt"/>
+                <a:sym typeface="Wingdings" panose="05000000000000000000" pitchFamily="2" charset="2"/>
+              </a:rPr>
+              <a:t>enda</a:t>
+            </a:r>
+            <a:r>
+              <a:rPr lang="en-US" sz="2000" dirty="0">
+                <a:ea typeface="Inter"/>
+                <a:cs typeface="+mn-lt"/>
+                <a:sym typeface="Wingdings" panose="05000000000000000000" pitchFamily="2" charset="2"/>
+              </a:rPr>
+              <a:t> localhost </a:t>
+            </a:r>
+            <a:r>
+              <a:rPr lang="en-US" sz="2000" dirty="0" err="1">
+                <a:ea typeface="Inter"/>
+                <a:cs typeface="+mn-lt"/>
+                <a:sym typeface="Wingdings" panose="05000000000000000000" pitchFamily="2" charset="2"/>
+              </a:rPr>
+              <a:t>serveriga</a:t>
+            </a:r>
+            <a:endParaRPr lang="en-US" sz="2000" dirty="0">
+              <a:cs typeface="+mn-lt"/>
+            </a:endParaRPr>
+          </a:p>
+          <a:p>
+            <a:pPr marL="285750" indent="-285750">
+              <a:lnSpc>
+                <a:spcPct val="150000"/>
+              </a:lnSpc>
+              <a:buClr>
+                <a:srgbClr val="121212"/>
+              </a:buClr>
+            </a:pPr>
+            <a:r>
+              <a:rPr lang="en-US" sz="2000" dirty="0">
+                <a:ea typeface="Inter"/>
+                <a:cs typeface="+mn-lt"/>
+              </a:rPr>
+              <a:t>SQL </a:t>
+            </a:r>
+            <a:r>
+              <a:rPr lang="en-US" sz="2000" dirty="0" err="1">
+                <a:ea typeface="Inter"/>
+                <a:cs typeface="+mn-lt"/>
+              </a:rPr>
+              <a:t>päringute</a:t>
+            </a:r>
+            <a:r>
+              <a:rPr lang="en-US" sz="2000" dirty="0">
+                <a:ea typeface="Inter"/>
+                <a:cs typeface="+mn-lt"/>
+              </a:rPr>
+              <a:t> </a:t>
+            </a:r>
+            <a:r>
+              <a:rPr lang="en-US" sz="2000" dirty="0" err="1">
+                <a:ea typeface="Inter"/>
+                <a:cs typeface="+mn-lt"/>
+              </a:rPr>
+              <a:t>jooksutamine</a:t>
+            </a:r>
+            <a:endParaRPr lang="en-US" sz="2000" dirty="0">
+              <a:ea typeface="Inter"/>
+              <a:cs typeface="+mn-lt"/>
+            </a:endParaRPr>
+          </a:p>
+          <a:p>
+            <a:pPr marL="800100" lvl="1">
+              <a:lnSpc>
+                <a:spcPct val="150000"/>
+              </a:lnSpc>
+              <a:buClr>
+                <a:srgbClr val="121212"/>
+              </a:buClr>
+            </a:pPr>
+            <a:r>
+              <a:rPr lang="en-US" sz="2000" dirty="0">
+                <a:cs typeface="+mn-lt"/>
+              </a:rPr>
+              <a:t>Ava </a:t>
+            </a:r>
+            <a:r>
+              <a:rPr lang="en-US" sz="2000" dirty="0" err="1">
+                <a:cs typeface="+mn-lt"/>
+              </a:rPr>
+              <a:t>päringutega</a:t>
+            </a:r>
+            <a:r>
+              <a:rPr lang="en-US" sz="2000" dirty="0">
+                <a:cs typeface="+mn-lt"/>
+              </a:rPr>
+              <a:t> SQL fail</a:t>
+            </a:r>
+            <a:endParaRPr lang="en-US" sz="2000" dirty="0">
+              <a:cs typeface="+mn-lt"/>
+              <a:sym typeface="Wingdings" panose="05000000000000000000" pitchFamily="2" charset="2"/>
+            </a:endParaRPr>
+          </a:p>
+          <a:p>
+            <a:pPr marL="800100" lvl="1">
+              <a:lnSpc>
+                <a:spcPct val="150000"/>
+              </a:lnSpc>
+              <a:buClr>
+                <a:srgbClr val="121212"/>
+              </a:buClr>
+            </a:pPr>
+            <a:r>
+              <a:rPr lang="en-US" sz="2000" dirty="0" err="1">
+                <a:cs typeface="+mn-lt"/>
+                <a:sym typeface="Wingdings" panose="05000000000000000000" pitchFamily="2" charset="2"/>
+              </a:rPr>
+              <a:t>Jooksuta</a:t>
+            </a:r>
+            <a:r>
+              <a:rPr lang="en-US" sz="2000" dirty="0">
+                <a:cs typeface="+mn-lt"/>
+                <a:sym typeface="Wingdings" panose="05000000000000000000" pitchFamily="2" charset="2"/>
+              </a:rPr>
+              <a:t> </a:t>
+            </a:r>
+            <a:r>
+              <a:rPr lang="en-US" sz="2000" dirty="0" err="1">
+                <a:cs typeface="+mn-lt"/>
+                <a:sym typeface="Wingdings" panose="05000000000000000000" pitchFamily="2" charset="2"/>
+              </a:rPr>
+              <a:t>käsk</a:t>
+            </a:r>
+            <a:endParaRPr lang="en-US" sz="2000" dirty="0">
+              <a:cs typeface="+mn-lt"/>
+            </a:endParaRPr>
+          </a:p>
+          <a:p>
+            <a:pPr marL="857250" lvl="1" indent="-342900">
+              <a:lnSpc>
+                <a:spcPct val="150000"/>
+              </a:lnSpc>
+              <a:buAutoNum type="arabicPeriod"/>
+            </a:pPr>
+            <a:endParaRPr lang="en-US" dirty="0">
+              <a:cs typeface="+mn-lt"/>
+            </a:endParaRPr>
+          </a:p>
+          <a:p>
+            <a:pPr marL="857250" lvl="1" indent="-342900">
+              <a:lnSpc>
+                <a:spcPct val="150000"/>
+              </a:lnSpc>
+              <a:buAutoNum type="arabicPeriod"/>
+            </a:pPr>
+            <a:endParaRPr lang="en-US" dirty="0">
+              <a:cs typeface="+mn-lt"/>
+            </a:endParaRPr>
+          </a:p>
+          <a:p>
+            <a:pPr marL="0" indent="0">
+              <a:buNone/>
+            </a:pPr>
+            <a:endParaRPr lang="en-US" dirty="0">
+              <a:cs typeface="+mn-lt"/>
+            </a:endParaRPr>
+          </a:p>
+          <a:p>
+            <a:endParaRPr lang="en-US" dirty="0">
+              <a:cs typeface="+mn-lt"/>
+            </a:endParaRPr>
+          </a:p>
+        </p:txBody>
+      </p:sp>
+    </p:spTree>
+    <p:extLst>
+      <p:ext uri="{BB962C8B-B14F-4D97-AF65-F5344CB8AC3E}">
+        <p14:creationId xmlns:p14="http://schemas.microsoft.com/office/powerpoint/2010/main" val="1821779248"/>
+      </p:ext>
+    </p:extLst>
+  </p:cSld>
+  <p:clrMapOvr>
+    <a:masterClrMapping/>
+  </p:clrMapOvr>
+</p:sld>
+</file>
+
+<file path=ppt/slides/slide7.xml><?xml version="1.0" encoding="utf-8"?>
+<p:sld xmlns:a="http://schemas.openxmlformats.org/drawingml/2006/main" xmlns:r="http://schemas.openxmlformats.org/officeDocument/2006/relationships" xmlns:p="http://schemas.openxmlformats.org/presentationml/2006/main">
+  <p:cSld>
+    <p:spTree>
+      <p:nvGrpSpPr>
+        <p:cNvPr id="1" name="">
+          <a:extLst>
+            <a:ext uri="{FF2B5EF4-FFF2-40B4-BE49-F238E27FC236}">
               <a16:creationId xmlns:a16="http://schemas.microsoft.com/office/drawing/2014/main" id="{2AC7CF3F-998F-1D31-7E8E-9D5F969A26AD}"/>
             </a:ext>
           </a:extLst>
@@ -25807,7 +26240,7 @@
 </p:sld>
 </file>
 
-<file path=ppt/slides/slide7.xml><?xml version="1.0" encoding="utf-8"?>
+<file path=ppt/slides/slide8.xml><?xml version="1.0" encoding="utf-8"?>
 <p:sld xmlns:a="http://schemas.openxmlformats.org/drawingml/2006/main" xmlns:r="http://schemas.openxmlformats.org/officeDocument/2006/relationships" xmlns:p="http://schemas.openxmlformats.org/presentationml/2006/main">
   <p:cSld>
     <p:spTree>
@@ -26716,6 +27149,15 @@
 </file>
 
 <file path=customXml/item1.xml><?xml version="1.0" encoding="utf-8"?>
+<?mso-contentType ?>
+<FormTemplates xmlns="http://schemas.microsoft.com/sharepoint/v3/contenttype/forms">
+  <Display>DocumentLibraryForm</Display>
+  <Edit>DocumentLibraryForm</Edit>
+  <New>DocumentLibraryForm</New>
+</FormTemplates>
+</file>
+
+<file path=customXml/item2.xml><?xml version="1.0" encoding="utf-8"?>
 <ct:contentTypeSchema xmlns:ct="http://schemas.microsoft.com/office/2006/metadata/contentType" xmlns:ma="http://schemas.microsoft.com/office/2006/metadata/properties/metaAttributes" ct:_="" ma:_="" ma:contentTypeName="Document" ma:contentTypeID="0x010100C4D27B8FA8976546BCD79313C588588D" ma:contentTypeVersion="8" ma:contentTypeDescription="Create a new document." ma:contentTypeScope="" ma:versionID="a112c56f6fe148a79025c76584832af0">
   <xsd:schema xmlns:xsd="http://www.w3.org/2001/XMLSchema" xmlns:xs="http://www.w3.org/2001/XMLSchema" xmlns:p="http://schemas.microsoft.com/office/2006/metadata/properties" xmlns:ns2="a1a2d923-8fea-42f1-bd41-9cdfff65694e" targetNamespace="http://schemas.microsoft.com/office/2006/metadata/properties" ma:root="true" ma:fieldsID="97c8655d467eaa9470a714421e7268c0" ns2:_="">
     <xsd:import namespace="a1a2d923-8fea-42f1-bd41-9cdfff65694e"/>
@@ -26883,15 +27325,6 @@
 </ct:contentTypeSchema>
 </file>
 
-<file path=customXml/item2.xml><?xml version="1.0" encoding="utf-8"?>
-<?mso-contentType ?>
-<FormTemplates xmlns="http://schemas.microsoft.com/sharepoint/v3/contenttype/forms">
-  <Display>DocumentLibraryForm</Display>
-  <Edit>DocumentLibraryForm</Edit>
-  <New>DocumentLibraryForm</New>
-</FormTemplates>
-</file>
-
 <file path=customXml/item3.xml><?xml version="1.0" encoding="utf-8"?>
 <p:properties xmlns:p="http://schemas.microsoft.com/office/2006/metadata/properties" xmlns:xsi="http://www.w3.org/2001/XMLSchema-instance" xmlns:pc="http://schemas.microsoft.com/office/infopath/2007/PartnerControls">
   <documentManagement/>
@@ -26899,6 +27332,14 @@
 </file>
 
 <file path=customXml/itemProps1.xml><?xml version="1.0" encoding="utf-8"?>
+<ds:datastoreItem xmlns:ds="http://schemas.openxmlformats.org/officeDocument/2006/customXml" ds:itemID="{9DC439CA-6F1C-4005-ACA6-A52E04DEE0A7}">
+  <ds:schemaRefs>
+    <ds:schemaRef ds:uri="http://schemas.microsoft.com/sharepoint/v3/contenttype/forms"/>
+  </ds:schemaRefs>
+</ds:datastoreItem>
+</file>
+
+<file path=customXml/itemProps2.xml><?xml version="1.0" encoding="utf-8"?>
 <ds:datastoreItem xmlns:ds="http://schemas.openxmlformats.org/officeDocument/2006/customXml" ds:itemID="{9CF4F972-2392-44D0-AA45-41AC4FDC4A59}">
   <ds:schemaRefs>
     <ds:schemaRef ds:uri="a1a2d923-8fea-42f1-bd41-9cdfff65694e"/>
@@ -26916,14 +27357,6 @@
 </ds:datastoreItem>
 </file>
 
-<file path=customXml/itemProps2.xml><?xml version="1.0" encoding="utf-8"?>
-<ds:datastoreItem xmlns:ds="http://schemas.openxmlformats.org/officeDocument/2006/customXml" ds:itemID="{9DC439CA-6F1C-4005-ACA6-A52E04DEE0A7}">
-  <ds:schemaRefs>
-    <ds:schemaRef ds:uri="http://schemas.microsoft.com/sharepoint/v3/contenttype/forms"/>
-  </ds:schemaRefs>
-</ds:datastoreItem>
-</file>
-
 <file path=customXml/itemProps3.xml><?xml version="1.0" encoding="utf-8"?>
 <ds:datastoreItem xmlns:ds="http://schemas.openxmlformats.org/officeDocument/2006/customXml" ds:itemID="{5BDF4908-A52A-47DD-A794-6E02D71942FC}">
   <ds:schemaRefs>
